--- a/docs/examples/pipeline.pptx
+++ b/docs/examples/pipeline.pptx
@@ -7,7 +7,7 @@
   <p:sldIdLst>
     <p:sldId id="256" r:id="rId7"/>
   </p:sldIdLst>
-  <p:sldSz cx="2827411" cy="1327785" type="screen4x3"/>
+  <p:sldSz cx="2827411" cy="1417320" type="screen4x3"/>
   <p:notesSz cx="6858000" cy="9144000"/>
   <p:defaultTextStyle>
     <a:defPPr>
@@ -3096,7 +3096,7 @@
         </p:nvCxnSpPr>
         <p:spPr>
           <a:xfrm>
-            <a:off x="137160" y="320516"/>
+            <a:off x="137160" y="342900"/>
             <a:ext cx="914400" cy="0"/>
           </a:xfrm>
           <a:prstGeom prst="line">
@@ -3134,8 +3134,8 @@
         </p:nvSpPr>
         <p:spPr>
           <a:xfrm>
-            <a:off x="301056" y="137160"/>
-            <a:ext cx="586606" cy="153352"/>
+            <a:off x="301056" y="156209"/>
+            <a:ext cx="586606" cy="160020"/>
           </a:xfrm>
           <a:prstGeom prst="rect">
             <a:avLst/>
@@ -3148,7 +3148,11 @@
           </a:bodyPr>
           <a:lstStyle/>
           <a:p>
-            <a:pPr algn="ctr"/>
+            <a:pPr algn="ctr">
+              <a:lnSpc>
+                <a:spcPct val="100000"/>
+              </a:lnSpc>
+            </a:pPr>
             <a:r>
               <a:rPr b="0" i="0" sz="1050">
                 <a:solidFill>
@@ -3170,8 +3174,8 @@
         </p:nvSpPr>
         <p:spPr>
           <a:xfrm>
-            <a:off x="301056" y="350520"/>
-            <a:ext cx="586606" cy="153352"/>
+            <a:off x="301056" y="369570"/>
+            <a:ext cx="586606" cy="160020"/>
           </a:xfrm>
           <a:prstGeom prst="rect">
             <a:avLst/>
@@ -3184,7 +3188,11 @@
           </a:bodyPr>
           <a:lstStyle/>
           <a:p>
-            <a:pPr algn="ctr"/>
+            <a:pPr algn="ctr">
+              <a:lnSpc>
+                <a:spcPct val="100000"/>
+              </a:lnSpc>
+            </a:pPr>
             <a:r>
               <a:rPr b="0" i="0" sz="1050">
                 <a:solidFill>
@@ -3207,11 +3215,11 @@
         <p:spPr>
           <a:xfrm>
             <a:off x="1051560" y="137160"/>
-            <a:ext cx="724291" cy="366712"/>
+            <a:ext cx="724291" cy="411479"/>
           </a:xfrm>
           <a:prstGeom prst="roundRect">
             <a:avLst>
-              <a:gd name="adj" fmla="val 25974"/>
+              <a:gd name="adj" fmla="val 23148"/>
             </a:avLst>
           </a:prstGeom>
           <a:noFill/>
@@ -3237,10 +3245,14 @@
           </a:fontRef>
         </p:style>
         <p:txBody>
-          <a:bodyPr rtlCol="0" anchor="ctr" wrap="none" tIns="0" bIns="0"/>
-          <a:lstStyle/>
-          <a:p>
-            <a:pPr algn="ctr"/>
+          <a:bodyPr rtlCol="0" anchor="ctr" wrap="none"/>
+          <a:lstStyle/>
+          <a:p>
+            <a:pPr algn="ctr">
+              <a:lnSpc>
+                <a:spcPct val="100000"/>
+              </a:lnSpc>
+            </a:pPr>
             <a:r>
               <a:rPr b="0" i="0" sz="1050">
                 <a:solidFill>
@@ -3253,7 +3265,11 @@
             </a:r>
           </a:p>
           <a:p>
-            <a:pPr algn="ctr"/>
+            <a:pPr algn="ctr">
+              <a:lnSpc>
+                <a:spcPct val="100000"/>
+              </a:lnSpc>
+            </a:pPr>
             <a:r>
               <a:rPr b="0" i="0" sz="1050">
                 <a:solidFill>
@@ -3275,7 +3291,7 @@
         </p:nvCxnSpPr>
         <p:spPr>
           <a:xfrm>
-            <a:off x="1775851" y="320516"/>
+            <a:off x="1775851" y="342900"/>
             <a:ext cx="914400" cy="0"/>
           </a:xfrm>
           <a:prstGeom prst="line">
@@ -3313,8 +3329,8 @@
         </p:nvSpPr>
         <p:spPr>
           <a:xfrm>
-            <a:off x="2039116" y="137160"/>
-            <a:ext cx="387870" cy="153352"/>
+            <a:off x="2039116" y="156209"/>
+            <a:ext cx="387870" cy="160020"/>
           </a:xfrm>
           <a:prstGeom prst="rect">
             <a:avLst/>
@@ -3327,7 +3343,11 @@
           </a:bodyPr>
           <a:lstStyle/>
           <a:p>
-            <a:pPr algn="ctr"/>
+            <a:pPr algn="ctr">
+              <a:lnSpc>
+                <a:spcPct val="100000"/>
+              </a:lnSpc>
+            </a:pPr>
             <a:r>
               <a:rPr b="0" i="0" sz="1050">
                 <a:solidFill>
@@ -3349,8 +3369,8 @@
         </p:nvSpPr>
         <p:spPr>
           <a:xfrm>
-            <a:off x="2039116" y="350520"/>
-            <a:ext cx="387870" cy="153352"/>
+            <a:off x="2039116" y="369570"/>
+            <a:ext cx="387870" cy="160020"/>
           </a:xfrm>
           <a:prstGeom prst="rect">
             <a:avLst/>
@@ -3363,7 +3383,11 @@
           </a:bodyPr>
           <a:lstStyle/>
           <a:p>
-            <a:pPr algn="ctr"/>
+            <a:pPr algn="ctr">
+              <a:lnSpc>
+                <a:spcPct val="100000"/>
+              </a:lnSpc>
+            </a:pPr>
             <a:r>
               <a:rPr b="0" i="0" sz="1050">
                 <a:solidFill>
@@ -3385,7 +3409,7 @@
         </p:nvCxnSpPr>
         <p:spPr>
           <a:xfrm>
-            <a:off x="1413705" y="503872"/>
+            <a:off x="1413705" y="548640"/>
             <a:ext cx="0" cy="320040"/>
           </a:xfrm>
           <a:prstGeom prst="line">
@@ -3423,8 +3447,8 @@
         </p:nvSpPr>
         <p:spPr>
           <a:xfrm>
-            <a:off x="1064892" y="823912"/>
-            <a:ext cx="697626" cy="366712"/>
+            <a:off x="1064892" y="868680"/>
+            <a:ext cx="697626" cy="411479"/>
           </a:xfrm>
           <a:prstGeom prst="foldedCorner">
             <a:avLst/>
@@ -3452,10 +3476,14 @@
           </a:fontRef>
         </p:style>
         <p:txBody>
-          <a:bodyPr rtlCol="0" anchor="ctr" wrap="none" tIns="0" bIns="0"/>
-          <a:lstStyle/>
-          <a:p>
-            <a:pPr algn="ctr"/>
+          <a:bodyPr rtlCol="0" anchor="ctr" wrap="none"/>
+          <a:lstStyle/>
+          <a:p>
+            <a:pPr algn="ctr">
+              <a:lnSpc>
+                <a:spcPct val="100000"/>
+              </a:lnSpc>
+            </a:pPr>
             <a:r>
               <a:rPr b="0" i="0" sz="1050">
                 <a:solidFill>
@@ -3468,7 +3496,11 @@
             </a:r>
           </a:p>
           <a:p>
-            <a:pPr algn="ctr"/>
+            <a:pPr algn="ctr">
+              <a:lnSpc>
+                <a:spcPct val="100000"/>
+              </a:lnSpc>
+            </a:pPr>
             <a:r>
               <a:rPr b="0" i="0" sz="1050">
                 <a:solidFill>

--- a/docs/examples/pipeline.pptx
+++ b/docs/examples/pipeline.pptx
@@ -7,7 +7,7 @@
   <p:sldIdLst>
     <p:sldId id="256" r:id="rId7"/>
   </p:sldIdLst>
-  <p:sldSz cx="2827411" cy="1417320" type="screen4x3"/>
+  <p:sldSz cx="6266914" cy="3263265" type="screen4x3"/>
   <p:notesSz cx="6858000" cy="9144000"/>
   <p:defaultTextStyle>
     <a:defPPr>
@@ -3088,16 +3088,74 @@
         <p:nvPr/>
       </p:nvGrpSpPr>
       <p:grpSpPr/>
+      <p:sp>
+        <p:nvSpPr>
+          <p:cNvPr id="2" name="LLM"/>
+          <p:cNvSpPr/>
+          <p:nvPr/>
+        </p:nvSpPr>
+        <p:spPr>
+          <a:xfrm>
+            <a:off x="137160" y="1205865"/>
+            <a:ext cx="1097280" cy="502920"/>
+          </a:xfrm>
+          <a:prstGeom prst="rect">
+            <a:avLst/>
+          </a:prstGeom>
+          <a:noFill/>
+          <a:ln w="13716">
+            <a:solidFill>
+              <a:srgbClr val="000000"/>
+            </a:solidFill>
+          </a:ln>
+          <a:effectLst/>
+        </p:spPr>
+        <p:style>
+          <a:lnRef idx="1">
+            <a:schemeClr val="accent1"/>
+          </a:lnRef>
+          <a:fillRef idx="3">
+            <a:schemeClr val="accent1"/>
+          </a:fillRef>
+          <a:effectRef idx="2">
+            <a:schemeClr val="accent1"/>
+          </a:effectRef>
+          <a:fontRef idx="minor">
+            <a:schemeClr val="lt1"/>
+          </a:fontRef>
+        </p:style>
+        <p:txBody>
+          <a:bodyPr rtlCol="0" anchor="ctr" wrap="square"/>
+          <a:lstStyle/>
+          <a:p>
+            <a:pPr algn="ctr">
+              <a:lnSpc>
+                <a:spcPct val="100000"/>
+              </a:lnSpc>
+            </a:pPr>
+            <a:r>
+              <a:rPr b="0" i="0" sz="1050">
+                <a:solidFill>
+                  <a:srgbClr val="000000"/>
+                </a:solidFill>
+                <a:latin typeface="+mn-lt"/>
+                <a:ea typeface="+mn-ea"/>
+              </a:rPr>
+              <a:t>LLM</a:t>
+            </a:r>
+          </a:p>
+        </p:txBody>
+      </p:sp>
       <p:cxnSp>
         <p:nvCxnSpPr>
-          <p:cNvPr id="2" name="arrow 1"/>
+          <p:cNvPr id="3" name="arrow 1"/>
           <p:cNvCxnSpPr/>
           <p:nvPr/>
         </p:nvCxnSpPr>
         <p:spPr>
           <a:xfrm>
-            <a:off x="137160" y="342900"/>
-            <a:ext cx="914400" cy="0"/>
+            <a:off x="1234440" y="1457325"/>
+            <a:ext cx="457200" cy="0"/>
           </a:xfrm>
           <a:prstGeom prst="line">
             <a:avLst/>
@@ -3128,99 +3186,17 @@
       </p:cxnSp>
       <p:sp>
         <p:nvSpPr>
-          <p:cNvPr id="3" name="arrow 1 text 1"/>
-          <p:cNvSpPr txBox="1"/>
+          <p:cNvPr id="4" name="Pik"/>
+          <p:cNvSpPr/>
           <p:nvPr/>
         </p:nvSpPr>
         <p:spPr>
           <a:xfrm>
-            <a:off x="301056" y="156209"/>
-            <a:ext cx="586606" cy="160020"/>
+            <a:off x="1691640" y="1205865"/>
+            <a:ext cx="731519" cy="502920"/>
           </a:xfrm>
-          <a:prstGeom prst="rect">
+          <a:prstGeom prst="foldedCorner">
             <a:avLst/>
-          </a:prstGeom>
-          <a:noFill/>
-        </p:spPr>
-        <p:txBody>
-          <a:bodyPr wrap="none" lIns="0" rIns="0" tIns="0" bIns="0">
-            <a:spAutoFit/>
-          </a:bodyPr>
-          <a:lstStyle/>
-          <a:p>
-            <a:pPr algn="ctr">
-              <a:lnSpc>
-                <a:spcPct val="100000"/>
-              </a:lnSpc>
-            </a:pPr>
-            <a:r>
-              <a:rPr b="0" i="0" sz="1050">
-                <a:solidFill>
-                  <a:srgbClr val="000000"/>
-                </a:solidFill>
-                <a:latin typeface="+mn-lt"/>
-                <a:ea typeface="+mn-ea"/>
-              </a:rPr>
-              <a:t>Markdown</a:t>
-            </a:r>
-          </a:p>
-        </p:txBody>
-      </p:sp>
-      <p:sp>
-        <p:nvSpPr>
-          <p:cNvPr id="4" name="arrow 1 text 2"/>
-          <p:cNvSpPr txBox="1"/>
-          <p:nvPr/>
-        </p:nvSpPr>
-        <p:spPr>
-          <a:xfrm>
-            <a:off x="301056" y="369570"/>
-            <a:ext cx="586606" cy="160020"/>
-          </a:xfrm>
-          <a:prstGeom prst="rect">
-            <a:avLst/>
-          </a:prstGeom>
-          <a:noFill/>
-        </p:spPr>
-        <p:txBody>
-          <a:bodyPr wrap="none" lIns="0" rIns="0" tIns="0" bIns="0">
-            <a:spAutoFit/>
-          </a:bodyPr>
-          <a:lstStyle/>
-          <a:p>
-            <a:pPr algn="ctr">
-              <a:lnSpc>
-                <a:spcPct val="100000"/>
-              </a:lnSpc>
-            </a:pPr>
-            <a:r>
-              <a:rPr b="0" i="0" sz="1050">
-                <a:solidFill>
-                  <a:srgbClr val="000000"/>
-                </a:solidFill>
-                <a:latin typeface="+mn-lt"/>
-                <a:ea typeface="+mn-ea"/>
-              </a:rPr>
-              <a:t>Source</a:t>
-            </a:r>
-          </a:p>
-        </p:txBody>
-      </p:sp>
-      <p:sp>
-        <p:nvSpPr>
-          <p:cNvPr id="5" name="box 1"/>
-          <p:cNvSpPr/>
-          <p:nvPr/>
-        </p:nvSpPr>
-        <p:spPr>
-          <a:xfrm>
-            <a:off x="1051560" y="137160"/>
-            <a:ext cx="724291" cy="411479"/>
-          </a:xfrm>
-          <a:prstGeom prst="roundRect">
-            <a:avLst>
-              <a:gd name="adj" fmla="val 23148"/>
-            </a:avLst>
           </a:prstGeom>
           <a:noFill/>
           <a:ln w="13716">
@@ -3245,7 +3221,7 @@
           </a:fontRef>
         </p:style>
         <p:txBody>
-          <a:bodyPr rtlCol="0" anchor="ctr" wrap="none"/>
+          <a:bodyPr rtlCol="0" anchor="ctr" wrap="square"/>
           <a:lstStyle/>
           <a:p>
             <a:pPr algn="ctr">
@@ -3261,38 +3237,21 @@
                 <a:latin typeface="+mn-lt"/>
                 <a:ea typeface="+mn-ea"/>
               </a:rPr>
-              <a:t>pikslide</a:t>
-            </a:r>
-          </a:p>
-          <a:p>
-            <a:pPr algn="ctr">
-              <a:lnSpc>
-                <a:spcPct val="100000"/>
-              </a:lnSpc>
-            </a:pPr>
-            <a:r>
-              <a:rPr b="0" i="0" sz="1050">
-                <a:solidFill>
-                  <a:srgbClr val="000000"/>
-                </a:solidFill>
-                <a:latin typeface="+mn-lt"/>
-                <a:ea typeface="+mn-ea"/>
-              </a:rPr>
-              <a:t>Formatter</a:t>
+              <a:t>.pik</a:t>
             </a:r>
           </a:p>
         </p:txBody>
       </p:sp>
       <p:cxnSp>
         <p:nvCxnSpPr>
-          <p:cNvPr id="6" name="arrow 2"/>
+          <p:cNvPr id="5" name="arrow 2"/>
           <p:cNvCxnSpPr/>
           <p:nvPr/>
         </p:nvCxnSpPr>
         <p:spPr>
           <a:xfrm>
-            <a:off x="1775851" y="342900"/>
-            <a:ext cx="914400" cy="0"/>
+            <a:off x="2423160" y="1457325"/>
+            <a:ext cx="457200" cy="0"/>
           </a:xfrm>
           <a:prstGeom prst="line">
             <a:avLst/>
@@ -3323,24 +3282,47 @@
       </p:cxnSp>
       <p:sp>
         <p:nvSpPr>
-          <p:cNvPr id="7" name="arrow 2 text 1"/>
-          <p:cNvSpPr txBox="1"/>
+          <p:cNvPr id="6" name="Pikslide"/>
+          <p:cNvSpPr/>
           <p:nvPr/>
         </p:nvSpPr>
         <p:spPr>
           <a:xfrm>
-            <a:off x="2039116" y="156209"/>
-            <a:ext cx="387870" cy="160020"/>
+            <a:off x="2880360" y="1205865"/>
+            <a:ext cx="1097280" cy="502920"/>
           </a:xfrm>
           <a:prstGeom prst="rect">
             <a:avLst/>
           </a:prstGeom>
-          <a:noFill/>
+          <a:solidFill>
+            <a:schemeClr val="accent1">
+              <a:lumMod val="40000"/>
+              <a:lumOff val="60000"/>
+            </a:schemeClr>
+          </a:solidFill>
+          <a:ln w="13716">
+            <a:solidFill>
+              <a:srgbClr val="000000"/>
+            </a:solidFill>
+          </a:ln>
+          <a:effectLst/>
         </p:spPr>
-        <p:txBody>
-          <a:bodyPr wrap="none" lIns="0" rIns="0" tIns="0" bIns="0">
-            <a:spAutoFit/>
-          </a:bodyPr>
+        <p:style>
+          <a:lnRef idx="1">
+            <a:schemeClr val="accent1"/>
+          </a:lnRef>
+          <a:fillRef idx="3">
+            <a:schemeClr val="accent1"/>
+          </a:fillRef>
+          <a:effectRef idx="2">
+            <a:schemeClr val="accent1"/>
+          </a:effectRef>
+          <a:fontRef idx="minor">
+            <a:schemeClr val="lt1"/>
+          </a:fontRef>
+        </p:style>
+        <p:txBody>
+          <a:bodyPr rtlCol="0" anchor="ctr" wrap="square"/>
           <a:lstStyle/>
           <a:p>
             <a:pPr algn="ctr">
@@ -3349,106 +3331,28 @@
               </a:lnSpc>
             </a:pPr>
             <a:r>
-              <a:rPr b="0" i="0" sz="1050">
+              <a:rPr b="1" i="0" sz="1050">
                 <a:solidFill>
                   <a:srgbClr val="000000"/>
                 </a:solidFill>
                 <a:latin typeface="+mn-lt"/>
                 <a:ea typeface="+mn-ea"/>
               </a:rPr>
-              <a:t>PPTX</a:t>
-            </a:r>
-          </a:p>
-        </p:txBody>
-      </p:sp>
-      <p:sp>
-        <p:nvSpPr>
-          <p:cNvPr id="8" name="arrow 2 text 2"/>
-          <p:cNvSpPr txBox="1"/>
+              <a:t>pikslide</a:t>
+            </a:r>
+          </a:p>
+        </p:txBody>
+      </p:sp>
+      <p:sp>
+        <p:nvSpPr>
+          <p:cNvPr id="7" name="Png"/>
+          <p:cNvSpPr/>
           <p:nvPr/>
         </p:nvSpPr>
         <p:spPr>
           <a:xfrm>
-            <a:off x="2039116" y="369570"/>
-            <a:ext cx="387870" cy="160020"/>
-          </a:xfrm>
-          <a:prstGeom prst="rect">
-            <a:avLst/>
-          </a:prstGeom>
-          <a:noFill/>
-        </p:spPr>
-        <p:txBody>
-          <a:bodyPr wrap="none" lIns="0" rIns="0" tIns="0" bIns="0">
-            <a:spAutoFit/>
-          </a:bodyPr>
-          <a:lstStyle/>
-          <a:p>
-            <a:pPr algn="ctr">
-              <a:lnSpc>
-                <a:spcPct val="100000"/>
-              </a:lnSpc>
-            </a:pPr>
-            <a:r>
-              <a:rPr b="0" i="0" sz="1050">
-                <a:solidFill>
-                  <a:srgbClr val="000000"/>
-                </a:solidFill>
-                <a:latin typeface="+mn-lt"/>
-                <a:ea typeface="+mn-ea"/>
-              </a:rPr>
-              <a:t>Output</a:t>
-            </a:r>
-          </a:p>
-        </p:txBody>
-      </p:sp>
-      <p:cxnSp>
-        <p:nvCxnSpPr>
-          <p:cNvPr id="9" name="arrow 3"/>
-          <p:cNvCxnSpPr/>
-          <p:nvPr/>
-        </p:nvCxnSpPr>
-        <p:spPr>
-          <a:xfrm>
-            <a:off x="1413705" y="548640"/>
-            <a:ext cx="0" cy="320040"/>
-          </a:xfrm>
-          <a:prstGeom prst="line">
-            <a:avLst/>
-          </a:prstGeom>
-          <a:ln w="13716">
-            <a:solidFill>
-              <a:srgbClr val="000000"/>
-            </a:solidFill>
-            <a:headEnd type="triangle"/>
-            <a:tailEnd type="none"/>
-          </a:ln>
-          <a:effectLst/>
-        </p:spPr>
-        <p:style>
-          <a:lnRef idx="2">
-            <a:schemeClr val="accent1"/>
-          </a:lnRef>
-          <a:fillRef idx="0">
-            <a:schemeClr val="accent1"/>
-          </a:fillRef>
-          <a:effectRef idx="1">
-            <a:schemeClr val="accent1"/>
-          </a:effectRef>
-          <a:fontRef idx="minor">
-            <a:schemeClr val="tx1"/>
-          </a:fontRef>
-        </p:style>
-      </p:cxnSp>
-      <p:sp>
-        <p:nvSpPr>
-          <p:cNvPr id="10" name="file 1"/>
-          <p:cNvSpPr/>
-          <p:nvPr/>
-        </p:nvSpPr>
-        <p:spPr>
-          <a:xfrm>
-            <a:off x="1064892" y="868680"/>
-            <a:ext cx="697626" cy="411479"/>
+            <a:off x="4709160" y="748665"/>
+            <a:ext cx="731520" cy="502920"/>
           </a:xfrm>
           <a:prstGeom prst="foldedCorner">
             <a:avLst/>
@@ -3476,7 +3380,7 @@
           </a:fontRef>
         </p:style>
         <p:txBody>
-          <a:bodyPr rtlCol="0" anchor="ctr" wrap="none"/>
+          <a:bodyPr rtlCol="0" anchor="ctr" wrap="square"/>
           <a:lstStyle/>
           <a:p>
             <a:pPr algn="ctr">
@@ -3492,9 +3396,50 @@
                 <a:latin typeface="+mn-lt"/>
                 <a:ea typeface="+mn-ea"/>
               </a:rPr>
-              <a:t>pikslide</a:t>
-            </a:r>
-          </a:p>
+              <a:t>.png</a:t>
+            </a:r>
+          </a:p>
+        </p:txBody>
+      </p:sp>
+      <p:sp>
+        <p:nvSpPr>
+          <p:cNvPr id="8" name="Pptx"/>
+          <p:cNvSpPr/>
+          <p:nvPr/>
+        </p:nvSpPr>
+        <p:spPr>
+          <a:xfrm>
+            <a:off x="4709160" y="1663065"/>
+            <a:ext cx="731520" cy="502920"/>
+          </a:xfrm>
+          <a:prstGeom prst="foldedCorner">
+            <a:avLst/>
+          </a:prstGeom>
+          <a:noFill/>
+          <a:ln w="13716">
+            <a:solidFill>
+              <a:srgbClr val="000000"/>
+            </a:solidFill>
+          </a:ln>
+          <a:effectLst/>
+        </p:spPr>
+        <p:style>
+          <a:lnRef idx="1">
+            <a:schemeClr val="accent1"/>
+          </a:lnRef>
+          <a:fillRef idx="3">
+            <a:schemeClr val="accent1"/>
+          </a:fillRef>
+          <a:effectRef idx="2">
+            <a:schemeClr val="accent1"/>
+          </a:effectRef>
+          <a:fontRef idx="minor">
+            <a:schemeClr val="lt1"/>
+          </a:fontRef>
+        </p:style>
+        <p:txBody>
+          <a:bodyPr rtlCol="0" anchor="ctr" wrap="square"/>
+          <a:lstStyle/>
           <a:p>
             <a:pPr algn="ctr">
               <a:lnSpc>
@@ -3509,7 +3454,732 @@
                 <a:latin typeface="+mn-lt"/>
                 <a:ea typeface="+mn-ea"/>
               </a:rPr>
-              <a:t>Language</a:t>
+              <a:t>.pptx</a:t>
+            </a:r>
+          </a:p>
+        </p:txBody>
+      </p:sp>
+      <p:sp>
+        <p:nvSpPr>
+          <p:cNvPr id="9" name="arrow 3"/>
+          <p:cNvSpPr/>
+          <p:nvPr/>
+        </p:nvSpPr>
+        <p:spPr>
+          <a:xfrm>
+            <a:off x="3977640" y="1000125"/>
+            <a:ext cx="731520" cy="457200"/>
+          </a:xfrm>
+          <a:custGeom>
+            <a:avLst/>
+            <a:gdLst/>
+            <a:ahLst/>
+            <a:cxnLst/>
+            <a:rect l="l" t="t" r="r" b="b"/>
+            <a:pathLst>
+              <a:path w="731520" h="457200">
+                <a:moveTo>
+                  <a:pt x="0" y="457200"/>
+                </a:moveTo>
+                <a:lnTo>
+                  <a:pt x="365760" y="457200"/>
+                </a:lnTo>
+                <a:lnTo>
+                  <a:pt x="365760" y="0"/>
+                </a:lnTo>
+                <a:lnTo>
+                  <a:pt x="731520" y="0"/>
+                </a:lnTo>
+              </a:path>
+            </a:pathLst>
+          </a:custGeom>
+          <a:noFill/>
+          <a:ln w="13716">
+            <a:solidFill>
+              <a:srgbClr val="000000"/>
+            </a:solidFill>
+            <a:headEnd type="none"/>
+            <a:tailEnd type="triangle"/>
+          </a:ln>
+          <a:effectLst/>
+        </p:spPr>
+        <p:style>
+          <a:lnRef idx="1">
+            <a:schemeClr val="accent1"/>
+          </a:lnRef>
+          <a:fillRef idx="3">
+            <a:schemeClr val="accent1"/>
+          </a:fillRef>
+          <a:effectRef idx="2">
+            <a:schemeClr val="accent1"/>
+          </a:effectRef>
+          <a:fontRef idx="minor">
+            <a:schemeClr val="lt1"/>
+          </a:fontRef>
+        </p:style>
+        <p:txBody>
+          <a:bodyPr rtlCol="0" anchor="ctr"/>
+          <a:lstStyle/>
+          <a:p>
+            <a:pPr algn="ctr"/>
+          </a:p>
+        </p:txBody>
+      </p:sp>
+      <p:sp>
+        <p:nvSpPr>
+          <p:cNvPr id="10" name="text 1"/>
+          <p:cNvSpPr/>
+          <p:nvPr/>
+        </p:nvSpPr>
+        <p:spPr>
+          <a:xfrm>
+            <a:off x="4312887" y="777240"/>
+            <a:ext cx="426784" cy="445770"/>
+          </a:xfrm>
+          <a:prstGeom prst="rect">
+            <a:avLst/>
+          </a:prstGeom>
+          <a:noFill/>
+          <a:ln>
+            <a:noFill/>
+          </a:ln>
+          <a:effectLst/>
+        </p:spPr>
+        <p:style>
+          <a:lnRef idx="1">
+            <a:schemeClr val="accent1"/>
+          </a:lnRef>
+          <a:fillRef idx="3">
+            <a:schemeClr val="accent1"/>
+          </a:fillRef>
+          <a:effectRef idx="2">
+            <a:schemeClr val="accent1"/>
+          </a:effectRef>
+          <a:fontRef idx="minor">
+            <a:schemeClr val="lt1"/>
+          </a:fontRef>
+        </p:style>
+        <p:txBody>
+          <a:bodyPr rtlCol="0" anchor="ctr" wrap="none" bIns="262890"/>
+          <a:lstStyle/>
+          <a:p>
+            <a:pPr algn="ctr">
+              <a:lnSpc>
+                <a:spcPct val="100000"/>
+              </a:lnSpc>
+            </a:pPr>
+            <a:r>
+              <a:rPr b="0" i="0" sz="900">
+                <a:solidFill>
+                  <a:srgbClr val="000000"/>
+                </a:solidFill>
+                <a:latin typeface="+mn-lt"/>
+                <a:ea typeface="+mn-ea"/>
+              </a:rPr>
+              <a:t>--png</a:t>
+            </a:r>
+          </a:p>
+        </p:txBody>
+      </p:sp>
+      <p:sp>
+        <p:nvSpPr>
+          <p:cNvPr id="11" name="arrow 4"/>
+          <p:cNvSpPr/>
+          <p:nvPr/>
+        </p:nvSpPr>
+        <p:spPr>
+          <a:xfrm>
+            <a:off x="3977640" y="1457325"/>
+            <a:ext cx="731520" cy="457200"/>
+          </a:xfrm>
+          <a:custGeom>
+            <a:avLst/>
+            <a:gdLst/>
+            <a:ahLst/>
+            <a:cxnLst/>
+            <a:rect l="l" t="t" r="r" b="b"/>
+            <a:pathLst>
+              <a:path w="731520" h="457200">
+                <a:moveTo>
+                  <a:pt x="0" y="0"/>
+                </a:moveTo>
+                <a:lnTo>
+                  <a:pt x="365760" y="0"/>
+                </a:lnTo>
+                <a:lnTo>
+                  <a:pt x="365760" y="457200"/>
+                </a:lnTo>
+                <a:lnTo>
+                  <a:pt x="731520" y="457200"/>
+                </a:lnTo>
+              </a:path>
+            </a:pathLst>
+          </a:custGeom>
+          <a:noFill/>
+          <a:ln w="13716">
+            <a:solidFill>
+              <a:srgbClr val="000000"/>
+            </a:solidFill>
+            <a:headEnd type="none"/>
+            <a:tailEnd type="triangle"/>
+          </a:ln>
+          <a:effectLst/>
+        </p:spPr>
+        <p:style>
+          <a:lnRef idx="1">
+            <a:schemeClr val="accent1"/>
+          </a:lnRef>
+          <a:fillRef idx="3">
+            <a:schemeClr val="accent1"/>
+          </a:fillRef>
+          <a:effectRef idx="2">
+            <a:schemeClr val="accent1"/>
+          </a:effectRef>
+          <a:fontRef idx="minor">
+            <a:schemeClr val="lt1"/>
+          </a:fontRef>
+        </p:style>
+        <p:txBody>
+          <a:bodyPr rtlCol="0" anchor="ctr"/>
+          <a:lstStyle/>
+          <a:p>
+            <a:pPr algn="ctr"/>
+          </a:p>
+        </p:txBody>
+      </p:sp>
+      <p:sp>
+        <p:nvSpPr>
+          <p:cNvPr id="12" name="You"/>
+          <p:cNvSpPr/>
+          <p:nvPr/>
+        </p:nvSpPr>
+        <p:spPr>
+          <a:xfrm>
+            <a:off x="137160" y="2714625"/>
+            <a:ext cx="5852160" cy="411480"/>
+          </a:xfrm>
+          <a:prstGeom prst="rect">
+            <a:avLst/>
+          </a:prstGeom>
+          <a:solidFill>
+            <a:schemeClr val="bg1">
+              <a:lumMod val="95000"/>
+            </a:schemeClr>
+          </a:solidFill>
+          <a:ln w="13716">
+            <a:solidFill>
+              <a:srgbClr val="000000"/>
+            </a:solidFill>
+          </a:ln>
+          <a:effectLst/>
+        </p:spPr>
+        <p:style>
+          <a:lnRef idx="1">
+            <a:schemeClr val="accent1"/>
+          </a:lnRef>
+          <a:fillRef idx="3">
+            <a:schemeClr val="accent1"/>
+          </a:fillRef>
+          <a:effectRef idx="2">
+            <a:schemeClr val="accent1"/>
+          </a:effectRef>
+          <a:fontRef idx="minor">
+            <a:schemeClr val="lt1"/>
+          </a:fontRef>
+        </p:style>
+        <p:txBody>
+          <a:bodyPr rtlCol="0" anchor="ctr" wrap="square"/>
+          <a:lstStyle/>
+          <a:p>
+            <a:pPr algn="ctr">
+              <a:lnSpc>
+                <a:spcPct val="100000"/>
+              </a:lnSpc>
+            </a:pPr>
+            <a:r>
+              <a:rPr b="1" i="0" sz="1050">
+                <a:solidFill>
+                  <a:srgbClr val="000000"/>
+                </a:solidFill>
+                <a:latin typeface="+mn-lt"/>
+                <a:ea typeface="+mn-ea"/>
+              </a:rPr>
+              <a:t>You</a:t>
+            </a:r>
+          </a:p>
+        </p:txBody>
+      </p:sp>
+      <p:cxnSp>
+        <p:nvCxnSpPr>
+          <p:cNvPr id="13" name="arrow 5"/>
+          <p:cNvCxnSpPr/>
+          <p:nvPr/>
+        </p:nvCxnSpPr>
+        <p:spPr>
+          <a:xfrm flipV="1">
+            <a:off x="685800" y="1708785"/>
+            <a:ext cx="0" cy="1005840"/>
+          </a:xfrm>
+          <a:prstGeom prst="line">
+            <a:avLst/>
+          </a:prstGeom>
+          <a:ln w="13716">
+            <a:solidFill>
+              <a:srgbClr val="000000"/>
+            </a:solidFill>
+            <a:headEnd type="none"/>
+            <a:tailEnd type="triangle"/>
+          </a:ln>
+          <a:effectLst/>
+        </p:spPr>
+        <p:style>
+          <a:lnRef idx="2">
+            <a:schemeClr val="accent1"/>
+          </a:lnRef>
+          <a:fillRef idx="0">
+            <a:schemeClr val="accent1"/>
+          </a:fillRef>
+          <a:effectRef idx="1">
+            <a:schemeClr val="accent1"/>
+          </a:effectRef>
+          <a:fontRef idx="minor">
+            <a:schemeClr val="tx1"/>
+          </a:fontRef>
+        </p:style>
+      </p:cxnSp>
+      <p:sp>
+        <p:nvSpPr>
+          <p:cNvPr id="14" name="arrow 5 text 1"/>
+          <p:cNvSpPr txBox="1"/>
+          <p:nvPr/>
+        </p:nvSpPr>
+        <p:spPr>
+          <a:xfrm>
+            <a:off x="777240" y="2131695"/>
+            <a:ext cx="405407" cy="160020"/>
+          </a:xfrm>
+          <a:prstGeom prst="rect">
+            <a:avLst/>
+          </a:prstGeom>
+          <a:noFill/>
+        </p:spPr>
+        <p:txBody>
+          <a:bodyPr wrap="none" lIns="0" rIns="0" tIns="0" bIns="0">
+            <a:spAutoFit/>
+          </a:bodyPr>
+          <a:lstStyle/>
+          <a:p>
+            <a:pPr algn="l">
+              <a:lnSpc>
+                <a:spcPct val="100000"/>
+              </a:lnSpc>
+            </a:pPr>
+            <a:r>
+              <a:rPr b="0" i="0" sz="1050">
+                <a:solidFill>
+                  <a:srgbClr val="000000"/>
+                </a:solidFill>
+                <a:latin typeface="+mn-lt"/>
+                <a:ea typeface="+mn-ea"/>
+              </a:rPr>
+              <a:t>prompt</a:t>
+            </a:r>
+          </a:p>
+        </p:txBody>
+      </p:sp>
+      <p:cxnSp>
+        <p:nvCxnSpPr>
+          <p:cNvPr id="15" name="arrow 6"/>
+          <p:cNvCxnSpPr/>
+          <p:nvPr/>
+        </p:nvCxnSpPr>
+        <p:spPr>
+          <a:xfrm flipV="1">
+            <a:off x="2057400" y="1708785"/>
+            <a:ext cx="0" cy="1005840"/>
+          </a:xfrm>
+          <a:prstGeom prst="line">
+            <a:avLst/>
+          </a:prstGeom>
+          <a:ln w="13716">
+            <a:solidFill>
+              <a:srgbClr val="000000"/>
+            </a:solidFill>
+            <a:headEnd type="none"/>
+            <a:tailEnd type="triangle"/>
+          </a:ln>
+          <a:effectLst/>
+        </p:spPr>
+        <p:style>
+          <a:lnRef idx="2">
+            <a:schemeClr val="accent1"/>
+          </a:lnRef>
+          <a:fillRef idx="0">
+            <a:schemeClr val="accent1"/>
+          </a:fillRef>
+          <a:effectRef idx="1">
+            <a:schemeClr val="accent1"/>
+          </a:effectRef>
+          <a:fontRef idx="minor">
+            <a:schemeClr val="tx1"/>
+          </a:fontRef>
+        </p:style>
+      </p:cxnSp>
+      <p:sp>
+        <p:nvSpPr>
+          <p:cNvPr id="16" name="arrow 6 text 1"/>
+          <p:cNvSpPr txBox="1"/>
+          <p:nvPr/>
+        </p:nvSpPr>
+        <p:spPr>
+          <a:xfrm>
+            <a:off x="2148840" y="2131695"/>
+            <a:ext cx="274320" cy="160020"/>
+          </a:xfrm>
+          <a:prstGeom prst="rect">
+            <a:avLst/>
+          </a:prstGeom>
+          <a:noFill/>
+        </p:spPr>
+        <p:txBody>
+          <a:bodyPr wrap="none" lIns="0" rIns="0" tIns="0" bIns="0">
+            <a:spAutoFit/>
+          </a:bodyPr>
+          <a:lstStyle/>
+          <a:p>
+            <a:pPr algn="l">
+              <a:lnSpc>
+                <a:spcPct val="100000"/>
+              </a:lnSpc>
+            </a:pPr>
+            <a:r>
+              <a:rPr b="0" i="0" sz="1050">
+                <a:solidFill>
+                  <a:srgbClr val="000000"/>
+                </a:solidFill>
+                <a:latin typeface="+mn-lt"/>
+                <a:ea typeface="+mn-ea"/>
+              </a:rPr>
+              <a:t>edit</a:t>
+            </a:r>
+          </a:p>
+        </p:txBody>
+      </p:sp>
+      <p:cxnSp>
+        <p:nvCxnSpPr>
+          <p:cNvPr id="17" name="arrow 7"/>
+          <p:cNvCxnSpPr/>
+          <p:nvPr/>
+        </p:nvCxnSpPr>
+        <p:spPr>
+          <a:xfrm flipV="1">
+            <a:off x="5074920" y="2165985"/>
+            <a:ext cx="0" cy="548640"/>
+          </a:xfrm>
+          <a:prstGeom prst="line">
+            <a:avLst/>
+          </a:prstGeom>
+          <a:ln w="13716">
+            <a:solidFill>
+              <a:srgbClr val="000000"/>
+            </a:solidFill>
+            <a:headEnd type="none"/>
+            <a:tailEnd type="triangle"/>
+          </a:ln>
+          <a:effectLst/>
+        </p:spPr>
+        <p:style>
+          <a:lnRef idx="2">
+            <a:schemeClr val="accent1"/>
+          </a:lnRef>
+          <a:fillRef idx="0">
+            <a:schemeClr val="accent1"/>
+          </a:fillRef>
+          <a:effectRef idx="1">
+            <a:schemeClr val="accent1"/>
+          </a:effectRef>
+          <a:fontRef idx="minor">
+            <a:schemeClr val="tx1"/>
+          </a:fontRef>
+        </p:style>
+      </p:cxnSp>
+      <p:sp>
+        <p:nvSpPr>
+          <p:cNvPr id="18" name="arrow 7 text 1"/>
+          <p:cNvSpPr txBox="1"/>
+          <p:nvPr/>
+        </p:nvSpPr>
+        <p:spPr>
+          <a:xfrm>
+            <a:off x="3987174" y="2360295"/>
+            <a:ext cx="996305" cy="160019"/>
+          </a:xfrm>
+          <a:prstGeom prst="rect">
+            <a:avLst/>
+          </a:prstGeom>
+          <a:noFill/>
+        </p:spPr>
+        <p:txBody>
+          <a:bodyPr wrap="none" lIns="0" rIns="0" tIns="0" bIns="0">
+            <a:spAutoFit/>
+          </a:bodyPr>
+          <a:lstStyle/>
+          <a:p>
+            <a:pPr algn="r">
+              <a:lnSpc>
+                <a:spcPct val="100000"/>
+              </a:lnSpc>
+            </a:pPr>
+            <a:r>
+              <a:rPr b="0" i="0" sz="1050">
+                <a:solidFill>
+                  <a:srgbClr val="000000"/>
+                </a:solidFill>
+                <a:latin typeface="+mn-lt"/>
+                <a:ea typeface="+mn-ea"/>
+              </a:rPr>
+              <a:t>edit in PowerPoint</a:t>
+            </a:r>
+          </a:p>
+        </p:txBody>
+      </p:sp>
+      <p:sp>
+        <p:nvSpPr>
+          <p:cNvPr id="19" name="arrow 8"/>
+          <p:cNvSpPr/>
+          <p:nvPr/>
+        </p:nvSpPr>
+        <p:spPr>
+          <a:xfrm>
+            <a:off x="5440680" y="1000125"/>
+            <a:ext cx="274320" cy="1714500"/>
+          </a:xfrm>
+          <a:custGeom>
+            <a:avLst/>
+            <a:gdLst/>
+            <a:ahLst/>
+            <a:cxnLst/>
+            <a:rect l="l" t="t" r="r" b="b"/>
+            <a:pathLst>
+              <a:path w="274320" h="1714500">
+                <a:moveTo>
+                  <a:pt x="0" y="0"/>
+                </a:moveTo>
+                <a:lnTo>
+                  <a:pt x="274320" y="0"/>
+                </a:lnTo>
+                <a:lnTo>
+                  <a:pt x="274320" y="1714500"/>
+                </a:lnTo>
+              </a:path>
+            </a:pathLst>
+          </a:custGeom>
+          <a:noFill/>
+          <a:ln w="13716">
+            <a:solidFill>
+              <a:srgbClr val="000000"/>
+            </a:solidFill>
+            <a:headEnd type="none"/>
+            <a:tailEnd type="triangle"/>
+          </a:ln>
+          <a:effectLst/>
+        </p:spPr>
+        <p:style>
+          <a:lnRef idx="1">
+            <a:schemeClr val="accent1"/>
+          </a:lnRef>
+          <a:fillRef idx="3">
+            <a:schemeClr val="accent1"/>
+          </a:fillRef>
+          <a:effectRef idx="2">
+            <a:schemeClr val="accent1"/>
+          </a:effectRef>
+          <a:fontRef idx="minor">
+            <a:schemeClr val="lt1"/>
+          </a:fontRef>
+        </p:style>
+        <p:txBody>
+          <a:bodyPr rtlCol="0" anchor="ctr"/>
+          <a:lstStyle/>
+          <a:p>
+            <a:pPr algn="ctr"/>
+          </a:p>
+        </p:txBody>
+      </p:sp>
+      <p:sp>
+        <p:nvSpPr>
+          <p:cNvPr id="20" name="text 2"/>
+          <p:cNvSpPr/>
+          <p:nvPr/>
+        </p:nvSpPr>
+        <p:spPr>
+          <a:xfrm>
+            <a:off x="5715000" y="1788795"/>
+            <a:ext cx="414754" cy="251459"/>
+          </a:xfrm>
+          <a:prstGeom prst="rect">
+            <a:avLst/>
+          </a:prstGeom>
+          <a:noFill/>
+          <a:ln>
+            <a:noFill/>
+          </a:ln>
+          <a:effectLst/>
+        </p:spPr>
+        <p:style>
+          <a:lnRef idx="1">
+            <a:schemeClr val="accent1"/>
+          </a:lnRef>
+          <a:fillRef idx="3">
+            <a:schemeClr val="accent1"/>
+          </a:fillRef>
+          <a:effectRef idx="2">
+            <a:schemeClr val="accent1"/>
+          </a:effectRef>
+          <a:fontRef idx="minor">
+            <a:schemeClr val="lt1"/>
+          </a:fontRef>
+        </p:style>
+        <p:txBody>
+          <a:bodyPr rtlCol="0" anchor="ctr" wrap="none"/>
+          <a:lstStyle/>
+          <a:p>
+            <a:pPr algn="l">
+              <a:lnSpc>
+                <a:spcPct val="100000"/>
+              </a:lnSpc>
+            </a:pPr>
+            <a:r>
+              <a:rPr b="0" i="0" sz="1050">
+                <a:solidFill>
+                  <a:srgbClr val="000000"/>
+                </a:solidFill>
+                <a:latin typeface="+mn-lt"/>
+                <a:ea typeface="+mn-ea"/>
+              </a:rPr>
+              <a:t>look</a:t>
+            </a:r>
+          </a:p>
+        </p:txBody>
+      </p:sp>
+      <p:sp>
+        <p:nvSpPr>
+          <p:cNvPr id="21" name="arrow 9"/>
+          <p:cNvSpPr/>
+          <p:nvPr/>
+        </p:nvSpPr>
+        <p:spPr>
+          <a:xfrm>
+            <a:off x="685800" y="382905"/>
+            <a:ext cx="4389120" cy="822960"/>
+          </a:xfrm>
+          <a:custGeom>
+            <a:avLst/>
+            <a:gdLst/>
+            <a:ahLst/>
+            <a:cxnLst/>
+            <a:rect l="l" t="t" r="r" b="b"/>
+            <a:pathLst>
+              <a:path w="4389120" h="822960">
+                <a:moveTo>
+                  <a:pt x="4389120" y="365760"/>
+                </a:moveTo>
+                <a:lnTo>
+                  <a:pt x="4389120" y="0"/>
+                </a:lnTo>
+                <a:lnTo>
+                  <a:pt x="0" y="0"/>
+                </a:lnTo>
+                <a:lnTo>
+                  <a:pt x="0" y="822960"/>
+                </a:lnTo>
+              </a:path>
+            </a:pathLst>
+          </a:custGeom>
+          <a:noFill/>
+          <a:ln w="13716">
+            <a:solidFill>
+              <a:srgbClr val="000000"/>
+            </a:solidFill>
+            <a:headEnd type="none"/>
+            <a:tailEnd type="triangle"/>
+          </a:ln>
+          <a:effectLst/>
+        </p:spPr>
+        <p:style>
+          <a:lnRef idx="1">
+            <a:schemeClr val="accent1"/>
+          </a:lnRef>
+          <a:fillRef idx="3">
+            <a:schemeClr val="accent1"/>
+          </a:fillRef>
+          <a:effectRef idx="2">
+            <a:schemeClr val="accent1"/>
+          </a:effectRef>
+          <a:fontRef idx="minor">
+            <a:schemeClr val="lt1"/>
+          </a:fontRef>
+        </p:style>
+        <p:txBody>
+          <a:bodyPr rtlCol="0" anchor="ctr"/>
+          <a:lstStyle/>
+          <a:p>
+            <a:pPr algn="ctr"/>
+          </a:p>
+        </p:txBody>
+      </p:sp>
+      <p:sp>
+        <p:nvSpPr>
+          <p:cNvPr id="22" name="text 3"/>
+          <p:cNvSpPr/>
+          <p:nvPr/>
+        </p:nvSpPr>
+        <p:spPr>
+          <a:xfrm>
+            <a:off x="2599136" y="137160"/>
+            <a:ext cx="1659726" cy="491490"/>
+          </a:xfrm>
+          <a:prstGeom prst="rect">
+            <a:avLst/>
+          </a:prstGeom>
+          <a:noFill/>
+          <a:ln>
+            <a:noFill/>
+          </a:ln>
+          <a:effectLst/>
+        </p:spPr>
+        <p:style>
+          <a:lnRef idx="1">
+            <a:schemeClr val="accent1"/>
+          </a:lnRef>
+          <a:fillRef idx="3">
+            <a:schemeClr val="accent1"/>
+          </a:fillRef>
+          <a:effectRef idx="2">
+            <a:schemeClr val="accent1"/>
+          </a:effectRef>
+          <a:fontRef idx="minor">
+            <a:schemeClr val="lt1"/>
+          </a:fontRef>
+        </p:style>
+        <p:txBody>
+          <a:bodyPr rtlCol="0" anchor="ctr" wrap="none" bIns="285749"/>
+          <a:lstStyle/>
+          <a:p>
+            <a:pPr algn="ctr">
+              <a:lnSpc>
+                <a:spcPct val="100000"/>
+              </a:lnSpc>
+            </a:pPr>
+            <a:r>
+              <a:rPr b="0" i="0" sz="1050">
+                <a:solidFill>
+                  <a:srgbClr val="000000"/>
+                </a:solidFill>
+                <a:latin typeface="+mn-lt"/>
+                <a:ea typeface="+mn-ea"/>
+              </a:rPr>
+              <a:t>look at the .png, fix the .pik</a:t>
             </a:r>
           </a:p>
         </p:txBody>

--- a/docs/examples/pipeline.pptx
+++ b/docs/examples/pipeline.pptx
@@ -7,7 +7,7 @@
   <p:sldIdLst>
     <p:sldId id="256" r:id="rId7"/>
   </p:sldIdLst>
-  <p:sldSz cx="6266914" cy="3263265" type="screen4x3"/>
+  <p:sldSz cx="6492240" cy="2651760" type="screen4x3"/>
   <p:notesSz cx="6858000" cy="9144000"/>
   <p:defaultTextStyle>
     <a:defPPr>
@@ -3096,7 +3096,7 @@
         </p:nvSpPr>
         <p:spPr>
           <a:xfrm>
-            <a:off x="137160" y="1205865"/>
+            <a:off x="137160" y="594360"/>
             <a:ext cx="1097280" cy="502920"/>
           </a:xfrm>
           <a:prstGeom prst="rect">
@@ -3154,7 +3154,103 @@
         </p:nvCxnSpPr>
         <p:spPr>
           <a:xfrm>
-            <a:off x="1234440" y="1457325"/>
+            <a:off x="1234440" y="845820"/>
+            <a:ext cx="1371600" cy="0"/>
+          </a:xfrm>
+          <a:prstGeom prst="line">
+            <a:avLst/>
+          </a:prstGeom>
+          <a:ln w="13716">
+            <a:solidFill>
+              <a:srgbClr val="000000"/>
+            </a:solidFill>
+            <a:headEnd type="none"/>
+            <a:tailEnd type="triangle"/>
+          </a:ln>
+          <a:effectLst/>
+        </p:spPr>
+        <p:style>
+          <a:lnRef idx="2">
+            <a:schemeClr val="accent1"/>
+          </a:lnRef>
+          <a:fillRef idx="0">
+            <a:schemeClr val="accent1"/>
+          </a:fillRef>
+          <a:effectRef idx="1">
+            <a:schemeClr val="accent1"/>
+          </a:effectRef>
+          <a:fontRef idx="minor">
+            <a:schemeClr val="tx1"/>
+          </a:fontRef>
+        </p:style>
+      </p:cxnSp>
+      <p:sp>
+        <p:nvSpPr>
+          <p:cNvPr id="4" name="Pik"/>
+          <p:cNvSpPr/>
+          <p:nvPr/>
+        </p:nvSpPr>
+        <p:spPr>
+          <a:xfrm>
+            <a:off x="2606040" y="594360"/>
+            <a:ext cx="731519" cy="502920"/>
+          </a:xfrm>
+          <a:prstGeom prst="foldedCorner">
+            <a:avLst/>
+          </a:prstGeom>
+          <a:noFill/>
+          <a:ln w="13716">
+            <a:solidFill>
+              <a:srgbClr val="000000"/>
+            </a:solidFill>
+          </a:ln>
+          <a:effectLst/>
+        </p:spPr>
+        <p:style>
+          <a:lnRef idx="1">
+            <a:schemeClr val="accent1"/>
+          </a:lnRef>
+          <a:fillRef idx="3">
+            <a:schemeClr val="accent1"/>
+          </a:fillRef>
+          <a:effectRef idx="2">
+            <a:schemeClr val="accent1"/>
+          </a:effectRef>
+          <a:fontRef idx="minor">
+            <a:schemeClr val="lt1"/>
+          </a:fontRef>
+        </p:style>
+        <p:txBody>
+          <a:bodyPr rtlCol="0" anchor="ctr" wrap="square"/>
+          <a:lstStyle/>
+          <a:p>
+            <a:pPr algn="ctr">
+              <a:lnSpc>
+                <a:spcPct val="100000"/>
+              </a:lnSpc>
+            </a:pPr>
+            <a:r>
+              <a:rPr b="0" i="0" sz="1050">
+                <a:solidFill>
+                  <a:srgbClr val="000000"/>
+                </a:solidFill>
+                <a:latin typeface="+mn-lt"/>
+                <a:ea typeface="+mn-ea"/>
+              </a:rPr>
+              <a:t>.pik</a:t>
+            </a:r>
+          </a:p>
+        </p:txBody>
+      </p:sp>
+      <p:cxnSp>
+        <p:nvCxnSpPr>
+          <p:cNvPr id="5" name="arrow 2"/>
+          <p:cNvCxnSpPr/>
+          <p:nvPr/>
+        </p:nvCxnSpPr>
+        <p:spPr>
+          <a:xfrm>
+            <a:off x="3337560" y="845820"/>
             <a:ext cx="457200" cy="0"/>
           </a:xfrm>
           <a:prstGeom prst="line">
@@ -3186,110 +3282,14 @@
       </p:cxnSp>
       <p:sp>
         <p:nvSpPr>
-          <p:cNvPr id="4" name="Pik"/>
-          <p:cNvSpPr/>
-          <p:nvPr/>
-        </p:nvSpPr>
-        <p:spPr>
-          <a:xfrm>
-            <a:off x="1691640" y="1205865"/>
-            <a:ext cx="731519" cy="502920"/>
-          </a:xfrm>
-          <a:prstGeom prst="foldedCorner">
-            <a:avLst/>
-          </a:prstGeom>
-          <a:noFill/>
-          <a:ln w="13716">
-            <a:solidFill>
-              <a:srgbClr val="000000"/>
-            </a:solidFill>
-          </a:ln>
-          <a:effectLst/>
-        </p:spPr>
-        <p:style>
-          <a:lnRef idx="1">
-            <a:schemeClr val="accent1"/>
-          </a:lnRef>
-          <a:fillRef idx="3">
-            <a:schemeClr val="accent1"/>
-          </a:fillRef>
-          <a:effectRef idx="2">
-            <a:schemeClr val="accent1"/>
-          </a:effectRef>
-          <a:fontRef idx="minor">
-            <a:schemeClr val="lt1"/>
-          </a:fontRef>
-        </p:style>
-        <p:txBody>
-          <a:bodyPr rtlCol="0" anchor="ctr" wrap="square"/>
-          <a:lstStyle/>
-          <a:p>
-            <a:pPr algn="ctr">
-              <a:lnSpc>
-                <a:spcPct val="100000"/>
-              </a:lnSpc>
-            </a:pPr>
-            <a:r>
-              <a:rPr b="0" i="0" sz="1050">
-                <a:solidFill>
-                  <a:srgbClr val="000000"/>
-                </a:solidFill>
-                <a:latin typeface="+mn-lt"/>
-                <a:ea typeface="+mn-ea"/>
-              </a:rPr>
-              <a:t>.pik</a:t>
-            </a:r>
-          </a:p>
-        </p:txBody>
-      </p:sp>
-      <p:cxnSp>
-        <p:nvCxnSpPr>
-          <p:cNvPr id="5" name="arrow 2"/>
-          <p:cNvCxnSpPr/>
-          <p:nvPr/>
-        </p:nvCxnSpPr>
-        <p:spPr>
-          <a:xfrm>
-            <a:off x="2423160" y="1457325"/>
-            <a:ext cx="457200" cy="0"/>
-          </a:xfrm>
-          <a:prstGeom prst="line">
-            <a:avLst/>
-          </a:prstGeom>
-          <a:ln w="13716">
-            <a:solidFill>
-              <a:srgbClr val="000000"/>
-            </a:solidFill>
-            <a:headEnd type="none"/>
-            <a:tailEnd type="triangle"/>
-          </a:ln>
-          <a:effectLst/>
-        </p:spPr>
-        <p:style>
-          <a:lnRef idx="2">
-            <a:schemeClr val="accent1"/>
-          </a:lnRef>
-          <a:fillRef idx="0">
-            <a:schemeClr val="accent1"/>
-          </a:fillRef>
-          <a:effectRef idx="1">
-            <a:schemeClr val="accent1"/>
-          </a:effectRef>
-          <a:fontRef idx="minor">
-            <a:schemeClr val="tx1"/>
-          </a:fontRef>
-        </p:style>
-      </p:cxnSp>
-      <p:sp>
-        <p:nvSpPr>
           <p:cNvPr id="6" name="Pikslide"/>
           <p:cNvSpPr/>
           <p:nvPr/>
         </p:nvSpPr>
         <p:spPr>
           <a:xfrm>
-            <a:off x="2880360" y="1205865"/>
-            <a:ext cx="1097280" cy="502920"/>
+            <a:off x="3794760" y="594360"/>
+            <a:ext cx="1097279" cy="502920"/>
           </a:xfrm>
           <a:prstGeom prst="rect">
             <a:avLst/>
@@ -3351,7 +3351,7 @@
         </p:nvSpPr>
         <p:spPr>
           <a:xfrm>
-            <a:off x="4709160" y="748665"/>
+            <a:off x="5623560" y="137160"/>
             <a:ext cx="731520" cy="502920"/>
           </a:xfrm>
           <a:prstGeom prst="foldedCorner">
@@ -3409,7 +3409,7 @@
         </p:nvSpPr>
         <p:spPr>
           <a:xfrm>
-            <a:off x="4709160" y="1663065"/>
+            <a:off x="5623560" y="1051560"/>
             <a:ext cx="731520" cy="502920"/>
           </a:xfrm>
           <a:prstGeom prst="foldedCorner">
@@ -3467,7 +3467,7 @@
         </p:nvSpPr>
         <p:spPr>
           <a:xfrm>
-            <a:off x="3977640" y="1000125"/>
+            <a:off x="4892040" y="388620"/>
             <a:ext cx="731520" cy="457200"/>
           </a:xfrm>
           <a:custGeom>
@@ -3533,7 +3533,7 @@
         </p:nvSpPr>
         <p:spPr>
           <a:xfrm>
-            <a:off x="4312887" y="777240"/>
+            <a:off x="5227287" y="165735"/>
             <a:ext cx="426784" cy="445770"/>
           </a:xfrm>
           <a:prstGeom prst="rect">
@@ -3589,8 +3589,8 @@
         </p:nvSpPr>
         <p:spPr>
           <a:xfrm>
-            <a:off x="3977640" y="1457325"/>
-            <a:ext cx="731520" cy="457200"/>
+            <a:off x="4892040" y="845820"/>
+            <a:ext cx="731520" cy="457199"/>
           </a:xfrm>
           <a:custGeom>
             <a:avLst/>
@@ -3599,7 +3599,7 @@
             <a:cxnLst/>
             <a:rect l="l" t="t" r="r" b="b"/>
             <a:pathLst>
-              <a:path w="731520" h="457200">
+              <a:path w="731520" h="457199">
                 <a:moveTo>
                   <a:pt x="0" y="0"/>
                 </a:moveTo>
@@ -3607,10 +3607,10 @@
                   <a:pt x="365760" y="0"/>
                 </a:lnTo>
                 <a:lnTo>
-                  <a:pt x="365760" y="457200"/>
+                  <a:pt x="365760" y="457199"/>
                 </a:lnTo>
                 <a:lnTo>
-                  <a:pt x="731520" y="457200"/>
+                  <a:pt x="731520" y="457199"/>
                 </a:lnTo>
               </a:path>
             </a:pathLst>
@@ -3655,8 +3655,8 @@
         </p:nvSpPr>
         <p:spPr>
           <a:xfrm>
-            <a:off x="137160" y="2714625"/>
-            <a:ext cx="5852160" cy="411480"/>
+            <a:off x="137160" y="2103120"/>
+            <a:ext cx="6217919" cy="411480"/>
           </a:xfrm>
           <a:prstGeom prst="rect">
             <a:avLst/>
@@ -3717,7 +3717,7 @@
         </p:nvCxnSpPr>
         <p:spPr>
           <a:xfrm flipV="1">
-            <a:off x="685800" y="1708785"/>
+            <a:off x="685800" y="1097280"/>
             <a:ext cx="0" cy="1005840"/>
           </a:xfrm>
           <a:prstGeom prst="line">
@@ -3755,8 +3755,8 @@
         </p:nvSpPr>
         <p:spPr>
           <a:xfrm>
-            <a:off x="777240" y="2131695"/>
-            <a:ext cx="405407" cy="160020"/>
+            <a:off x="777240" y="1413509"/>
+            <a:ext cx="1943149" cy="160020"/>
           </a:xfrm>
           <a:prstGeom prst="rect">
             <a:avLst/>
@@ -3787,15 +3787,95 @@
           </a:p>
         </p:txBody>
       </p:sp>
+      <p:sp>
+        <p:nvSpPr>
+          <p:cNvPr id="15" name="arrow 5 text 2"/>
+          <p:cNvSpPr txBox="1"/>
+          <p:nvPr/>
+        </p:nvSpPr>
+        <p:spPr>
+          <a:xfrm>
+            <a:off x="777240" y="1520189"/>
+            <a:ext cx="1943149" cy="160020"/>
+          </a:xfrm>
+          <a:prstGeom prst="rect">
+            <a:avLst/>
+          </a:prstGeom>
+          <a:noFill/>
+        </p:spPr>
+        <p:txBody>
+          <a:bodyPr wrap="none" lIns="0" rIns="0" tIns="0" bIns="0">
+            <a:spAutoFit/>
+          </a:bodyPr>
+          <a:lstStyle/>
+          <a:p>
+            <a:pPr algn="l">
+              <a:lnSpc>
+                <a:spcPct val="100000"/>
+              </a:lnSpc>
+            </a:pPr>
+            <a:r>
+              <a:rPr b="0" i="0" sz="900">
+                <a:solidFill>
+                  <a:srgbClr val="000000"/>
+                </a:solidFill>
+                <a:latin typeface="+mn-lt"/>
+                <a:ea typeface="+mn-ea"/>
+              </a:rPr>
+              <a:t>e.g. “draw how Japan's capital moved”</a:t>
+            </a:r>
+          </a:p>
+        </p:txBody>
+      </p:sp>
+      <p:sp>
+        <p:nvSpPr>
+          <p:cNvPr id="16" name="arrow 5 text 3"/>
+          <p:cNvSpPr txBox="1"/>
+          <p:nvPr/>
+        </p:nvSpPr>
+        <p:spPr>
+          <a:xfrm>
+            <a:off x="777240" y="1626870"/>
+            <a:ext cx="1943149" cy="160019"/>
+          </a:xfrm>
+          <a:prstGeom prst="rect">
+            <a:avLst/>
+          </a:prstGeom>
+          <a:noFill/>
+        </p:spPr>
+        <p:txBody>
+          <a:bodyPr wrap="none" lIns="0" rIns="0" tIns="0" bIns="0">
+            <a:spAutoFit/>
+          </a:bodyPr>
+          <a:lstStyle/>
+          <a:p>
+            <a:pPr algn="l">
+              <a:lnSpc>
+                <a:spcPct val="100000"/>
+              </a:lnSpc>
+            </a:pPr>
+            <a:r>
+              <a:rPr b="0" i="0" sz="900">
+                <a:solidFill>
+                  <a:srgbClr val="000000"/>
+                </a:solidFill>
+                <a:latin typeface="+mn-lt"/>
+                <a:ea typeface="+mn-ea"/>
+              </a:rPr>
+              <a:t>or “apply my edits in the .pptx to the .pik”</a:t>
+            </a:r>
+          </a:p>
+        </p:txBody>
+      </p:sp>
       <p:cxnSp>
         <p:nvCxnSpPr>
-          <p:cNvPr id="15" name="arrow 6"/>
+          <p:cNvPr id="17" name="arrow 6"/>
           <p:cNvCxnSpPr/>
           <p:nvPr/>
         </p:nvCxnSpPr>
         <p:spPr>
           <a:xfrm flipV="1">
-            <a:off x="2057400" y="1708785"/>
+            <a:off x="2971800" y="1097280"/>
             <a:ext cx="0" cy="1005840"/>
           </a:xfrm>
           <a:prstGeom prst="line">
@@ -3827,14 +3907,14 @@
       </p:cxnSp>
       <p:sp>
         <p:nvSpPr>
-          <p:cNvPr id="16" name="arrow 6 text 1"/>
+          <p:cNvPr id="18" name="arrow 6 text 1"/>
           <p:cNvSpPr txBox="1"/>
           <p:nvPr/>
         </p:nvSpPr>
         <p:spPr>
           <a:xfrm>
-            <a:off x="2148840" y="2131695"/>
-            <a:ext cx="274320" cy="160020"/>
+            <a:off x="3063240" y="1520189"/>
+            <a:ext cx="274319" cy="160020"/>
           </a:xfrm>
           <a:prstGeom prst="rect">
             <a:avLst/>
@@ -3867,13 +3947,13 @@
       </p:sp>
       <p:cxnSp>
         <p:nvCxnSpPr>
-          <p:cNvPr id="17" name="arrow 7"/>
+          <p:cNvPr id="19" name="arrow 7"/>
           <p:cNvCxnSpPr/>
           <p:nvPr/>
         </p:nvCxnSpPr>
         <p:spPr>
           <a:xfrm flipV="1">
-            <a:off x="5074920" y="2165985"/>
+            <a:off x="5989320" y="1554480"/>
             <a:ext cx="0" cy="548640"/>
           </a:xfrm>
           <a:prstGeom prst="line">
@@ -3905,13 +3985,13 @@
       </p:cxnSp>
       <p:sp>
         <p:nvSpPr>
-          <p:cNvPr id="18" name="arrow 7 text 1"/>
+          <p:cNvPr id="20" name="arrow 7 text 1"/>
           <p:cNvSpPr txBox="1"/>
           <p:nvPr/>
         </p:nvSpPr>
         <p:spPr>
           <a:xfrm>
-            <a:off x="3987174" y="2360295"/>
+            <a:off x="4901574" y="1748789"/>
             <a:ext cx="996305" cy="160019"/>
           </a:xfrm>
           <a:prstGeom prst="rect">
@@ -3939,247 +4019,6 @@
                 <a:ea typeface="+mn-ea"/>
               </a:rPr>
               <a:t>edit in PowerPoint</a:t>
-            </a:r>
-          </a:p>
-        </p:txBody>
-      </p:sp>
-      <p:sp>
-        <p:nvSpPr>
-          <p:cNvPr id="19" name="arrow 8"/>
-          <p:cNvSpPr/>
-          <p:nvPr/>
-        </p:nvSpPr>
-        <p:spPr>
-          <a:xfrm>
-            <a:off x="5440680" y="1000125"/>
-            <a:ext cx="274320" cy="1714500"/>
-          </a:xfrm>
-          <a:custGeom>
-            <a:avLst/>
-            <a:gdLst/>
-            <a:ahLst/>
-            <a:cxnLst/>
-            <a:rect l="l" t="t" r="r" b="b"/>
-            <a:pathLst>
-              <a:path w="274320" h="1714500">
-                <a:moveTo>
-                  <a:pt x="0" y="0"/>
-                </a:moveTo>
-                <a:lnTo>
-                  <a:pt x="274320" y="0"/>
-                </a:lnTo>
-                <a:lnTo>
-                  <a:pt x="274320" y="1714500"/>
-                </a:lnTo>
-              </a:path>
-            </a:pathLst>
-          </a:custGeom>
-          <a:noFill/>
-          <a:ln w="13716">
-            <a:solidFill>
-              <a:srgbClr val="000000"/>
-            </a:solidFill>
-            <a:headEnd type="none"/>
-            <a:tailEnd type="triangle"/>
-          </a:ln>
-          <a:effectLst/>
-        </p:spPr>
-        <p:style>
-          <a:lnRef idx="1">
-            <a:schemeClr val="accent1"/>
-          </a:lnRef>
-          <a:fillRef idx="3">
-            <a:schemeClr val="accent1"/>
-          </a:fillRef>
-          <a:effectRef idx="2">
-            <a:schemeClr val="accent1"/>
-          </a:effectRef>
-          <a:fontRef idx="minor">
-            <a:schemeClr val="lt1"/>
-          </a:fontRef>
-        </p:style>
-        <p:txBody>
-          <a:bodyPr rtlCol="0" anchor="ctr"/>
-          <a:lstStyle/>
-          <a:p>
-            <a:pPr algn="ctr"/>
-          </a:p>
-        </p:txBody>
-      </p:sp>
-      <p:sp>
-        <p:nvSpPr>
-          <p:cNvPr id="20" name="text 2"/>
-          <p:cNvSpPr/>
-          <p:nvPr/>
-        </p:nvSpPr>
-        <p:spPr>
-          <a:xfrm>
-            <a:off x="5715000" y="1788795"/>
-            <a:ext cx="414754" cy="251459"/>
-          </a:xfrm>
-          <a:prstGeom prst="rect">
-            <a:avLst/>
-          </a:prstGeom>
-          <a:noFill/>
-          <a:ln>
-            <a:noFill/>
-          </a:ln>
-          <a:effectLst/>
-        </p:spPr>
-        <p:style>
-          <a:lnRef idx="1">
-            <a:schemeClr val="accent1"/>
-          </a:lnRef>
-          <a:fillRef idx="3">
-            <a:schemeClr val="accent1"/>
-          </a:fillRef>
-          <a:effectRef idx="2">
-            <a:schemeClr val="accent1"/>
-          </a:effectRef>
-          <a:fontRef idx="minor">
-            <a:schemeClr val="lt1"/>
-          </a:fontRef>
-        </p:style>
-        <p:txBody>
-          <a:bodyPr rtlCol="0" anchor="ctr" wrap="none"/>
-          <a:lstStyle/>
-          <a:p>
-            <a:pPr algn="l">
-              <a:lnSpc>
-                <a:spcPct val="100000"/>
-              </a:lnSpc>
-            </a:pPr>
-            <a:r>
-              <a:rPr b="0" i="0" sz="1050">
-                <a:solidFill>
-                  <a:srgbClr val="000000"/>
-                </a:solidFill>
-                <a:latin typeface="+mn-lt"/>
-                <a:ea typeface="+mn-ea"/>
-              </a:rPr>
-              <a:t>look</a:t>
-            </a:r>
-          </a:p>
-        </p:txBody>
-      </p:sp>
-      <p:sp>
-        <p:nvSpPr>
-          <p:cNvPr id="21" name="arrow 9"/>
-          <p:cNvSpPr/>
-          <p:nvPr/>
-        </p:nvSpPr>
-        <p:spPr>
-          <a:xfrm>
-            <a:off x="685800" y="382905"/>
-            <a:ext cx="4389120" cy="822960"/>
-          </a:xfrm>
-          <a:custGeom>
-            <a:avLst/>
-            <a:gdLst/>
-            <a:ahLst/>
-            <a:cxnLst/>
-            <a:rect l="l" t="t" r="r" b="b"/>
-            <a:pathLst>
-              <a:path w="4389120" h="822960">
-                <a:moveTo>
-                  <a:pt x="4389120" y="365760"/>
-                </a:moveTo>
-                <a:lnTo>
-                  <a:pt x="4389120" y="0"/>
-                </a:lnTo>
-                <a:lnTo>
-                  <a:pt x="0" y="0"/>
-                </a:lnTo>
-                <a:lnTo>
-                  <a:pt x="0" y="822960"/>
-                </a:lnTo>
-              </a:path>
-            </a:pathLst>
-          </a:custGeom>
-          <a:noFill/>
-          <a:ln w="13716">
-            <a:solidFill>
-              <a:srgbClr val="000000"/>
-            </a:solidFill>
-            <a:headEnd type="none"/>
-            <a:tailEnd type="triangle"/>
-          </a:ln>
-          <a:effectLst/>
-        </p:spPr>
-        <p:style>
-          <a:lnRef idx="1">
-            <a:schemeClr val="accent1"/>
-          </a:lnRef>
-          <a:fillRef idx="3">
-            <a:schemeClr val="accent1"/>
-          </a:fillRef>
-          <a:effectRef idx="2">
-            <a:schemeClr val="accent1"/>
-          </a:effectRef>
-          <a:fontRef idx="minor">
-            <a:schemeClr val="lt1"/>
-          </a:fontRef>
-        </p:style>
-        <p:txBody>
-          <a:bodyPr rtlCol="0" anchor="ctr"/>
-          <a:lstStyle/>
-          <a:p>
-            <a:pPr algn="ctr"/>
-          </a:p>
-        </p:txBody>
-      </p:sp>
-      <p:sp>
-        <p:nvSpPr>
-          <p:cNvPr id="22" name="text 3"/>
-          <p:cNvSpPr/>
-          <p:nvPr/>
-        </p:nvSpPr>
-        <p:spPr>
-          <a:xfrm>
-            <a:off x="2599136" y="137160"/>
-            <a:ext cx="1659726" cy="491490"/>
-          </a:xfrm>
-          <a:prstGeom prst="rect">
-            <a:avLst/>
-          </a:prstGeom>
-          <a:noFill/>
-          <a:ln>
-            <a:noFill/>
-          </a:ln>
-          <a:effectLst/>
-        </p:spPr>
-        <p:style>
-          <a:lnRef idx="1">
-            <a:schemeClr val="accent1"/>
-          </a:lnRef>
-          <a:fillRef idx="3">
-            <a:schemeClr val="accent1"/>
-          </a:fillRef>
-          <a:effectRef idx="2">
-            <a:schemeClr val="accent1"/>
-          </a:effectRef>
-          <a:fontRef idx="minor">
-            <a:schemeClr val="lt1"/>
-          </a:fontRef>
-        </p:style>
-        <p:txBody>
-          <a:bodyPr rtlCol="0" anchor="ctr" wrap="none" bIns="285749"/>
-          <a:lstStyle/>
-          <a:p>
-            <a:pPr algn="ctr">
-              <a:lnSpc>
-                <a:spcPct val="100000"/>
-              </a:lnSpc>
-            </a:pPr>
-            <a:r>
-              <a:rPr b="0" i="0" sz="1050">
-                <a:solidFill>
-                  <a:srgbClr val="000000"/>
-                </a:solidFill>
-                <a:latin typeface="+mn-lt"/>
-                <a:ea typeface="+mn-ea"/>
-              </a:rPr>
-              <a:t>look at the .png, fix the .pik</a:t>
             </a:r>
           </a:p>
         </p:txBody>

--- a/docs/examples/pipeline.pptx
+++ b/docs/examples/pipeline.pptx
@@ -3099,14 +3099,22 @@
             <a:off x="137160" y="594360"/>
             <a:ext cx="1097280" cy="502920"/>
           </a:xfrm>
-          <a:prstGeom prst="rect">
-            <a:avLst/>
+          <a:prstGeom prst="roundRect">
+            <a:avLst>
+              <a:gd name="adj" fmla="val 18181"/>
+            </a:avLst>
           </a:prstGeom>
-          <a:noFill/>
+          <a:solidFill>
+            <a:schemeClr val="accent1">
+              <a:lumMod val="40000"/>
+              <a:lumOff val="60000"/>
+            </a:schemeClr>
+          </a:solidFill>
           <a:ln w="13716">
             <a:solidFill>
               <a:srgbClr val="000000"/>
             </a:solidFill>
+            <a:prstDash val="dash"/>
           </a:ln>
           <a:effectLst/>
         </p:spPr>
@@ -3134,7 +3142,7 @@
               </a:lnSpc>
             </a:pPr>
             <a:r>
-              <a:rPr b="0" i="0" sz="1050">
+              <a:rPr b="1" i="0" sz="1050">
                 <a:solidFill>
                   <a:srgbClr val="000000"/>
                 </a:solidFill>
@@ -3164,6 +3172,7 @@
             <a:solidFill>
               <a:srgbClr val="000000"/>
             </a:solidFill>
+            <a:prstDash val="dash"/>
             <a:headEnd type="none"/>
             <a:tailEnd type="triangle"/>
           </a:ln>
@@ -3195,107 +3204,11 @@
             <a:off x="2606040" y="594360"/>
             <a:ext cx="731519" cy="502920"/>
           </a:xfrm>
-          <a:prstGeom prst="foldedCorner">
-            <a:avLst/>
-          </a:prstGeom>
-          <a:noFill/>
-          <a:ln w="13716">
-            <a:solidFill>
-              <a:srgbClr val="000000"/>
-            </a:solidFill>
-          </a:ln>
-          <a:effectLst/>
-        </p:spPr>
-        <p:style>
-          <a:lnRef idx="1">
-            <a:schemeClr val="accent1"/>
-          </a:lnRef>
-          <a:fillRef idx="3">
-            <a:schemeClr val="accent1"/>
-          </a:fillRef>
-          <a:effectRef idx="2">
-            <a:schemeClr val="accent1"/>
-          </a:effectRef>
-          <a:fontRef idx="minor">
-            <a:schemeClr val="lt1"/>
-          </a:fontRef>
-        </p:style>
-        <p:txBody>
-          <a:bodyPr rtlCol="0" anchor="ctr" wrap="square"/>
-          <a:lstStyle/>
-          <a:p>
-            <a:pPr algn="ctr">
-              <a:lnSpc>
-                <a:spcPct val="100000"/>
-              </a:lnSpc>
-            </a:pPr>
-            <a:r>
-              <a:rPr b="0" i="0" sz="1050">
-                <a:solidFill>
-                  <a:srgbClr val="000000"/>
-                </a:solidFill>
-                <a:latin typeface="+mn-lt"/>
-                <a:ea typeface="+mn-ea"/>
-              </a:rPr>
-              <a:t>.pik</a:t>
-            </a:r>
-          </a:p>
-        </p:txBody>
-      </p:sp>
-      <p:cxnSp>
-        <p:nvCxnSpPr>
-          <p:cNvPr id="5" name="arrow 2"/>
-          <p:cNvCxnSpPr/>
-          <p:nvPr/>
-        </p:nvCxnSpPr>
-        <p:spPr>
-          <a:xfrm>
-            <a:off x="3337560" y="845820"/>
-            <a:ext cx="457200" cy="0"/>
-          </a:xfrm>
-          <a:prstGeom prst="line">
-            <a:avLst/>
-          </a:prstGeom>
-          <a:ln w="13716">
-            <a:solidFill>
-              <a:srgbClr val="000000"/>
-            </a:solidFill>
-            <a:headEnd type="none"/>
-            <a:tailEnd type="triangle"/>
-          </a:ln>
-          <a:effectLst/>
-        </p:spPr>
-        <p:style>
-          <a:lnRef idx="2">
-            <a:schemeClr val="accent1"/>
-          </a:lnRef>
-          <a:fillRef idx="0">
-            <a:schemeClr val="accent1"/>
-          </a:fillRef>
-          <a:effectRef idx="1">
-            <a:schemeClr val="accent1"/>
-          </a:effectRef>
-          <a:fontRef idx="minor">
-            <a:schemeClr val="tx1"/>
-          </a:fontRef>
-        </p:style>
-      </p:cxnSp>
-      <p:sp>
-        <p:nvSpPr>
-          <p:cNvPr id="6" name="Pikslide"/>
-          <p:cNvSpPr/>
-          <p:nvPr/>
-        </p:nvSpPr>
-        <p:spPr>
-          <a:xfrm>
-            <a:off x="3794760" y="594360"/>
-            <a:ext cx="1097279" cy="502920"/>
-          </a:xfrm>
-          <a:prstGeom prst="rect">
+          <a:prstGeom prst="flowChartDocument">
             <a:avLst/>
           </a:prstGeom>
           <a:solidFill>
-            <a:schemeClr val="accent1">
+            <a:schemeClr val="accent2">
               <a:lumMod val="40000"/>
               <a:lumOff val="60000"/>
             </a:schemeClr>
@@ -3338,26 +3251,68 @@
                 <a:latin typeface="+mn-lt"/>
                 <a:ea typeface="+mn-ea"/>
               </a:rPr>
-              <a:t>pikslide</a:t>
-            </a:r>
-          </a:p>
-        </p:txBody>
-      </p:sp>
-      <p:sp>
-        <p:nvSpPr>
-          <p:cNvPr id="7" name="Png"/>
+              <a:t>.pik</a:t>
+            </a:r>
+          </a:p>
+        </p:txBody>
+      </p:sp>
+      <p:cxnSp>
+        <p:nvCxnSpPr>
+          <p:cNvPr id="5" name="arrow 2"/>
+          <p:cNvCxnSpPr/>
+          <p:nvPr/>
+        </p:nvCxnSpPr>
+        <p:spPr>
+          <a:xfrm>
+            <a:off x="3337560" y="845820"/>
+            <a:ext cx="457200" cy="0"/>
+          </a:xfrm>
+          <a:prstGeom prst="line">
+            <a:avLst/>
+          </a:prstGeom>
+          <a:ln w="27432">
+            <a:solidFill>
+              <a:srgbClr val="000000"/>
+            </a:solidFill>
+            <a:headEnd type="none"/>
+            <a:tailEnd type="triangle"/>
+          </a:ln>
+          <a:effectLst/>
+        </p:spPr>
+        <p:style>
+          <a:lnRef idx="2">
+            <a:schemeClr val="accent1"/>
+          </a:lnRef>
+          <a:fillRef idx="0">
+            <a:schemeClr val="accent1"/>
+          </a:fillRef>
+          <a:effectRef idx="1">
+            <a:schemeClr val="accent1"/>
+          </a:effectRef>
+          <a:fontRef idx="minor">
+            <a:schemeClr val="tx1"/>
+          </a:fontRef>
+        </p:style>
+      </p:cxnSp>
+      <p:sp>
+        <p:nvSpPr>
+          <p:cNvPr id="6" name="Pikslide"/>
           <p:cNvSpPr/>
           <p:nvPr/>
         </p:nvSpPr>
         <p:spPr>
           <a:xfrm>
-            <a:off x="5623560" y="137160"/>
-            <a:ext cx="731520" cy="502920"/>
+            <a:off x="3794760" y="594360"/>
+            <a:ext cx="1097279" cy="502920"/>
           </a:xfrm>
-          <a:prstGeom prst="foldedCorner">
-            <a:avLst/>
+          <a:prstGeom prst="roundRect">
+            <a:avLst>
+              <a:gd name="adj" fmla="val 18181"/>
+            </a:avLst>
           </a:prstGeom>
-          <a:noFill/>
+          <a:solidFill>
+            <a:schemeClr val="accent1"/>
+          </a:solidFill>
           <a:ln w="13716">
             <a:solidFill>
               <a:srgbClr val="000000"/>
@@ -3389,33 +3344,38 @@
               </a:lnSpc>
             </a:pPr>
             <a:r>
-              <a:rPr b="0" i="0" sz="1050">
+              <a:rPr b="1" i="0" sz="1050">
                 <a:solidFill>
-                  <a:srgbClr val="000000"/>
+                  <a:schemeClr val="bg1"/>
                 </a:solidFill>
                 <a:latin typeface="+mn-lt"/>
                 <a:ea typeface="+mn-ea"/>
               </a:rPr>
-              <a:t>.png</a:t>
-            </a:r>
-          </a:p>
-        </p:txBody>
-      </p:sp>
-      <p:sp>
-        <p:nvSpPr>
-          <p:cNvPr id="8" name="Pptx"/>
+              <a:t>pikslide</a:t>
+            </a:r>
+          </a:p>
+        </p:txBody>
+      </p:sp>
+      <p:sp>
+        <p:nvSpPr>
+          <p:cNvPr id="7" name="Png"/>
           <p:cNvSpPr/>
           <p:nvPr/>
         </p:nvSpPr>
         <p:spPr>
           <a:xfrm>
-            <a:off x="5623560" y="1051560"/>
+            <a:off x="5623560" y="137160"/>
             <a:ext cx="731520" cy="502920"/>
           </a:xfrm>
-          <a:prstGeom prst="foldedCorner">
+          <a:prstGeom prst="flowChartDocument">
             <a:avLst/>
           </a:prstGeom>
-          <a:noFill/>
+          <a:solidFill>
+            <a:schemeClr val="accent2">
+              <a:lumMod val="40000"/>
+              <a:lumOff val="60000"/>
+            </a:schemeClr>
+          </a:solidFill>
           <a:ln w="13716">
             <a:solidFill>
               <a:srgbClr val="000000"/>
@@ -3447,7 +3407,70 @@
               </a:lnSpc>
             </a:pPr>
             <a:r>
-              <a:rPr b="0" i="0" sz="1050">
+              <a:rPr b="1" i="0" sz="1050">
+                <a:solidFill>
+                  <a:srgbClr val="000000"/>
+                </a:solidFill>
+                <a:latin typeface="+mn-lt"/>
+                <a:ea typeface="+mn-ea"/>
+              </a:rPr>
+              <a:t>.png</a:t>
+            </a:r>
+          </a:p>
+        </p:txBody>
+      </p:sp>
+      <p:sp>
+        <p:nvSpPr>
+          <p:cNvPr id="8" name="Pptx"/>
+          <p:cNvSpPr/>
+          <p:nvPr/>
+        </p:nvSpPr>
+        <p:spPr>
+          <a:xfrm>
+            <a:off x="5623560" y="1051560"/>
+            <a:ext cx="731520" cy="502920"/>
+          </a:xfrm>
+          <a:prstGeom prst="flowChartDocument">
+            <a:avLst/>
+          </a:prstGeom>
+          <a:solidFill>
+            <a:schemeClr val="accent2">
+              <a:lumMod val="40000"/>
+              <a:lumOff val="60000"/>
+            </a:schemeClr>
+          </a:solidFill>
+          <a:ln w="13716">
+            <a:solidFill>
+              <a:srgbClr val="000000"/>
+            </a:solidFill>
+          </a:ln>
+          <a:effectLst/>
+        </p:spPr>
+        <p:style>
+          <a:lnRef idx="1">
+            <a:schemeClr val="accent1"/>
+          </a:lnRef>
+          <a:fillRef idx="3">
+            <a:schemeClr val="accent1"/>
+          </a:fillRef>
+          <a:effectRef idx="2">
+            <a:schemeClr val="accent1"/>
+          </a:effectRef>
+          <a:fontRef idx="minor">
+            <a:schemeClr val="lt1"/>
+          </a:fontRef>
+        </p:style>
+        <p:txBody>
+          <a:bodyPr rtlCol="0" anchor="ctr" wrap="square"/>
+          <a:lstStyle/>
+          <a:p>
+            <a:pPr algn="ctr">
+              <a:lnSpc>
+                <a:spcPct val="100000"/>
+              </a:lnSpc>
+            </a:pPr>
+            <a:r>
+              <a:rPr b="1" i="0" sz="1050">
                 <a:solidFill>
                   <a:srgbClr val="000000"/>
                 </a:solidFill>
@@ -3494,7 +3517,7 @@
             </a:pathLst>
           </a:custGeom>
           <a:noFill/>
-          <a:ln w="13716">
+          <a:ln w="27432">
             <a:solidFill>
               <a:srgbClr val="000000"/>
             </a:solidFill>
@@ -3616,7 +3639,7 @@
             </a:pathLst>
           </a:custGeom>
           <a:noFill/>
-          <a:ln w="13716">
+          <a:ln w="27432">
             <a:solidFill>
               <a:srgbClr val="000000"/>
             </a:solidFill>
@@ -3727,6 +3750,7 @@
             <a:solidFill>
               <a:srgbClr val="000000"/>
             </a:solidFill>
+            <a:prstDash val="dash"/>
             <a:headEnd type="none"/>
             <a:tailEnd type="triangle"/>
           </a:ln>
@@ -3875,8 +3899,8 @@
         </p:nvCxnSpPr>
         <p:spPr>
           <a:xfrm flipV="1">
-            <a:off x="2971800" y="1097280"/>
-            <a:ext cx="0" cy="1005840"/>
+            <a:off x="2971800" y="1063752"/>
+            <a:ext cx="0" cy="1039368"/>
           </a:xfrm>
           <a:prstGeom prst="line">
             <a:avLst/>
@@ -3913,8 +3937,8 @@
         </p:nvSpPr>
         <p:spPr>
           <a:xfrm>
-            <a:off x="3063240" y="1520189"/>
-            <a:ext cx="274319" cy="160020"/>
+            <a:off x="3063240" y="1503426"/>
+            <a:ext cx="1034429" cy="160020"/>
           </a:xfrm>
           <a:prstGeom prst="rect">
             <a:avLst/>
@@ -3940,7 +3964,7 @@
                 <a:latin typeface="+mn-lt"/>
                 <a:ea typeface="+mn-ea"/>
               </a:rPr>
-              <a:t>edit</a:t>
+              <a:t>edit in a text editor</a:t>
             </a:r>
           </a:p>
         </p:txBody>
@@ -3953,8 +3977,8 @@
         </p:nvCxnSpPr>
         <p:spPr>
           <a:xfrm flipV="1">
-            <a:off x="5989320" y="1554480"/>
-            <a:ext cx="0" cy="548640"/>
+            <a:off x="5989320" y="1520952"/>
+            <a:ext cx="0" cy="582168"/>
           </a:xfrm>
           <a:prstGeom prst="line">
             <a:avLst/>
@@ -3991,7 +4015,7 @@
         </p:nvSpPr>
         <p:spPr>
           <a:xfrm>
-            <a:off x="4901574" y="1748789"/>
+            <a:off x="4901574" y="1732026"/>
             <a:ext cx="996305" cy="160019"/>
           </a:xfrm>
           <a:prstGeom prst="rect">
